--- a/@Materi Kuliah/Materi_Model_Linear_Generalisasi/Presentasi_Model_Linear_Generalisasi_Profesional_dari_HTML.pptx
+++ b/@Materi Kuliah/Materi_Model_Linear_Generalisasi/Presentasi_Model_Linear_Generalisasi_Profesional_dari_HTML.pptx
@@ -2,131 +2,36 @@
 <file path=ppt/presentation.xml><?xml version="1.0" encoding="utf-8"?>
 <p:presentation xmlns:p="http://schemas.openxmlformats.org/presentationml/2006/main">
   <p:sldMasterIdLst>
-    <p:sldMasterId xmlns:r="http://schemas.openxmlformats.org/officeDocument/2006/relationships" id="2147483648" r:id="R7981e4a954324906"/>
+    <p:sldMasterId xmlns:r="http://schemas.openxmlformats.org/officeDocument/2006/relationships" id="2147483648" r:id="Rbd2695f5bf8d487a"/>
   </p:sldMasterIdLst>
   <p:notesMasterIdLst>
-    <p:notesMasterId xmlns:r="http://schemas.openxmlformats.org/officeDocument/2006/relationships" r:id="R1a7edd5264d54bfc"/>
+    <p:notesMasterId xmlns:r="http://schemas.openxmlformats.org/officeDocument/2006/relationships" r:id="R45d26397b0e34cad"/>
   </p:notesMasterIdLst>
   <p:sldIdLst>
-    <p:sldId xmlns:r="http://schemas.openxmlformats.org/officeDocument/2006/relationships" id="256" r:id="R1439e531e8654154"/>
-    <p:sldId xmlns:r="http://schemas.openxmlformats.org/officeDocument/2006/relationships" id="257" r:id="Re71ef33f15804594"/>
-    <p:sldId xmlns:r="http://schemas.openxmlformats.org/officeDocument/2006/relationships" id="258" r:id="Reaa79404d30645e2"/>
-    <p:sldId xmlns:r="http://schemas.openxmlformats.org/officeDocument/2006/relationships" id="259" r:id="R8e3b32e58ff94bda"/>
-    <p:sldId xmlns:r="http://schemas.openxmlformats.org/officeDocument/2006/relationships" id="260" r:id="Ra930fe459e6d44a6"/>
-    <p:sldId xmlns:r="http://schemas.openxmlformats.org/officeDocument/2006/relationships" id="261" r:id="R12d554e225924272"/>
-    <p:sldId xmlns:r="http://schemas.openxmlformats.org/officeDocument/2006/relationships" id="262" r:id="R6dc8bf0d9a5b413d"/>
-    <p:sldId xmlns:r="http://schemas.openxmlformats.org/officeDocument/2006/relationships" id="263" r:id="R7bfa938c1ab34749"/>
-    <p:sldId xmlns:r="http://schemas.openxmlformats.org/officeDocument/2006/relationships" id="264" r:id="R06ea8b36a2c445ef"/>
-    <p:sldId xmlns:r="http://schemas.openxmlformats.org/officeDocument/2006/relationships" id="265" r:id="Rc30f4aab43864533"/>
-    <p:sldId xmlns:r="http://schemas.openxmlformats.org/officeDocument/2006/relationships" id="266" r:id="Rd194de4eedb44cbf"/>
-    <p:sldId xmlns:r="http://schemas.openxmlformats.org/officeDocument/2006/relationships" id="267" r:id="Rd2406a5d5e534d12"/>
-    <p:sldId xmlns:r="http://schemas.openxmlformats.org/officeDocument/2006/relationships" id="268" r:id="R0eeef002ebc54438"/>
-    <p:sldId xmlns:r="http://schemas.openxmlformats.org/officeDocument/2006/relationships" id="269" r:id="Rdb5052c4619f4645"/>
-    <p:sldId xmlns:r="http://schemas.openxmlformats.org/officeDocument/2006/relationships" id="270" r:id="Rf5a80b01e6904303"/>
-    <p:sldId xmlns:r="http://schemas.openxmlformats.org/officeDocument/2006/relationships" id="271" r:id="Rc773a42e447b494c"/>
-    <p:sldId xmlns:r="http://schemas.openxmlformats.org/officeDocument/2006/relationships" id="272" r:id="R8b9ac5cc63774408"/>
-    <p:sldId xmlns:r="http://schemas.openxmlformats.org/officeDocument/2006/relationships" id="273" r:id="Re61aa1cf135d4854"/>
-    <p:sldId xmlns:r="http://schemas.openxmlformats.org/officeDocument/2006/relationships" id="274" r:id="Reef1b7014c6f414f"/>
-    <p:sldId xmlns:r="http://schemas.openxmlformats.org/officeDocument/2006/relationships" id="275" r:id="R36d7e8cf4d544000"/>
-    <p:sldId xmlns:r="http://schemas.openxmlformats.org/officeDocument/2006/relationships" id="276" r:id="R15ed3818544f475d"/>
+    <p:sldId xmlns:r="http://schemas.openxmlformats.org/officeDocument/2006/relationships" id="256" r:id="Rc0842339f67a4567"/>
+    <p:sldId xmlns:r="http://schemas.openxmlformats.org/officeDocument/2006/relationships" id="257" r:id="R22fc91c0476a49f5"/>
+    <p:sldId xmlns:r="http://schemas.openxmlformats.org/officeDocument/2006/relationships" id="258" r:id="R64dd402bf8f84b5a"/>
+    <p:sldId xmlns:r="http://schemas.openxmlformats.org/officeDocument/2006/relationships" id="259" r:id="R184cf5a13bdb43a6"/>
+    <p:sldId xmlns:r="http://schemas.openxmlformats.org/officeDocument/2006/relationships" id="260" r:id="R12ebedfb6cb84095"/>
+    <p:sldId xmlns:r="http://schemas.openxmlformats.org/officeDocument/2006/relationships" id="261" r:id="Ra994fc24c0a64f4a"/>
+    <p:sldId xmlns:r="http://schemas.openxmlformats.org/officeDocument/2006/relationships" id="262" r:id="R2ca6e273043f4364"/>
+    <p:sldId xmlns:r="http://schemas.openxmlformats.org/officeDocument/2006/relationships" id="263" r:id="Ra7ca9c76f0e843a1"/>
+    <p:sldId xmlns:r="http://schemas.openxmlformats.org/officeDocument/2006/relationships" id="264" r:id="R4874a53f21e74c4b"/>
+    <p:sldId xmlns:r="http://schemas.openxmlformats.org/officeDocument/2006/relationships" id="265" r:id="R3fdf12eb1a6746c9"/>
+    <p:sldId xmlns:r="http://schemas.openxmlformats.org/officeDocument/2006/relationships" id="266" r:id="R1448b95e030143d8"/>
+    <p:sldId xmlns:r="http://schemas.openxmlformats.org/officeDocument/2006/relationships" id="267" r:id="R80f98a0494284ed0"/>
+    <p:sldId xmlns:r="http://schemas.openxmlformats.org/officeDocument/2006/relationships" id="268" r:id="Ree35e63c07c1405b"/>
+    <p:sldId xmlns:r="http://schemas.openxmlformats.org/officeDocument/2006/relationships" id="269" r:id="R3ea9c2f5e396477a"/>
+    <p:sldId xmlns:r="http://schemas.openxmlformats.org/officeDocument/2006/relationships" id="270" r:id="R13617a72e444404d"/>
+    <p:sldId xmlns:r="http://schemas.openxmlformats.org/officeDocument/2006/relationships" id="271" r:id="Ra2037051afc343ff"/>
+    <p:sldId xmlns:r="http://schemas.openxmlformats.org/officeDocument/2006/relationships" id="272" r:id="R66951aeebae4479e"/>
+    <p:sldId xmlns:r="http://schemas.openxmlformats.org/officeDocument/2006/relationships" id="273" r:id="Rc0ac11beca8b482c"/>
+    <p:sldId xmlns:r="http://schemas.openxmlformats.org/officeDocument/2006/relationships" id="274" r:id="Ra0657839aa0b47c0"/>
+    <p:sldId xmlns:r="http://schemas.openxmlformats.org/officeDocument/2006/relationships" id="275" r:id="Rf664248d8bf54cb0"/>
+    <p:sldId xmlns:r="http://schemas.openxmlformats.org/officeDocument/2006/relationships" id="276" r:id="R8d379e3abb2f4a55"/>
   </p:sldIdLst>
   <p:sldSz cx="12192000" cy="6858000"/>
   <p:notesSz cx="6858000" cy="9144000"/>
-  <p:defaultTextStyle>
-    <a:defPPr xmlns:a="http://schemas.openxmlformats.org/drawingml/2006/main">
-      <a:defRPr lang="en-US"/>
-    </a:defPPr>
-    <a:lvl1pPr xmlns:a="http://schemas.openxmlformats.org/drawingml/2006/main" marL="0" indent="0" algn="l" defTabSz="914400">
-      <a:defRPr sz="1800" kern="1200">
-        <a:solidFill>
-          <a:schemeClr val="tx1"/>
-        </a:solidFill>
-        <a:latin typeface="+mn-lt"/>
-        <a:ea typeface="+mn-ea"/>
-        <a:cs typeface="+mn-cs"/>
-      </a:defRPr>
-    </a:lvl1pPr>
-    <a:lvl2pPr xmlns:a="http://schemas.openxmlformats.org/drawingml/2006/main" marL="457200" indent="0" algn="l" defTabSz="914400">
-      <a:defRPr sz="1800" kern="1200">
-        <a:solidFill>
-          <a:schemeClr val="tx1"/>
-        </a:solidFill>
-        <a:latin typeface="+mn-lt"/>
-        <a:ea typeface="+mn-ea"/>
-        <a:cs typeface="+mn-cs"/>
-      </a:defRPr>
-    </a:lvl2pPr>
-    <a:lvl3pPr xmlns:a="http://schemas.openxmlformats.org/drawingml/2006/main" marL="914400" indent="0" algn="l" defTabSz="914400">
-      <a:defRPr sz="1800" kern="1200">
-        <a:solidFill>
-          <a:schemeClr val="tx1"/>
-        </a:solidFill>
-        <a:latin typeface="+mn-lt"/>
-        <a:ea typeface="+mn-ea"/>
-        <a:cs typeface="+mn-cs"/>
-      </a:defRPr>
-    </a:lvl3pPr>
-    <a:lvl4pPr xmlns:a="http://schemas.openxmlformats.org/drawingml/2006/main" marL="1371600" indent="0" algn="l" defTabSz="914400">
-      <a:defRPr sz="1800" kern="1200">
-        <a:solidFill>
-          <a:schemeClr val="tx1"/>
-        </a:solidFill>
-        <a:latin typeface="+mn-lt"/>
-        <a:ea typeface="+mn-ea"/>
-        <a:cs typeface="+mn-cs"/>
-      </a:defRPr>
-    </a:lvl4pPr>
-    <a:lvl5pPr xmlns:a="http://schemas.openxmlformats.org/drawingml/2006/main" marL="1828800" indent="0" algn="l" defTabSz="914400">
-      <a:defRPr sz="1800" kern="1200">
-        <a:solidFill>
-          <a:schemeClr val="tx1"/>
-        </a:solidFill>
-        <a:latin typeface="+mn-lt"/>
-        <a:ea typeface="+mn-ea"/>
-        <a:cs typeface="+mn-cs"/>
-      </a:defRPr>
-    </a:lvl5pPr>
-    <a:lvl6pPr xmlns:a="http://schemas.openxmlformats.org/drawingml/2006/main" marL="2286000" indent="0" algn="l" defTabSz="914400">
-      <a:defRPr sz="1800" kern="1200">
-        <a:solidFill>
-          <a:schemeClr val="tx1"/>
-        </a:solidFill>
-        <a:latin typeface="+mn-lt"/>
-        <a:ea typeface="+mn-ea"/>
-        <a:cs typeface="+mn-cs"/>
-      </a:defRPr>
-    </a:lvl6pPr>
-    <a:lvl7pPr xmlns:a="http://schemas.openxmlformats.org/drawingml/2006/main" marL="2743200" indent="0" algn="l" defTabSz="914400">
-      <a:defRPr sz="1800" kern="1200">
-        <a:solidFill>
-          <a:schemeClr val="tx1"/>
-        </a:solidFill>
-        <a:latin typeface="+mn-lt"/>
-        <a:ea typeface="+mn-ea"/>
-        <a:cs typeface="+mn-cs"/>
-      </a:defRPr>
-    </a:lvl7pPr>
-    <a:lvl8pPr xmlns:a="http://schemas.openxmlformats.org/drawingml/2006/main" marL="3200400" indent="0" algn="l" defTabSz="914400">
-      <a:defRPr sz="1800" kern="1200">
-        <a:solidFill>
-          <a:schemeClr val="tx1"/>
-        </a:solidFill>
-        <a:latin typeface="+mn-lt"/>
-        <a:ea typeface="+mn-ea"/>
-        <a:cs typeface="+mn-cs"/>
-      </a:defRPr>
-    </a:lvl8pPr>
-    <a:lvl9pPr xmlns:a="http://schemas.openxmlformats.org/drawingml/2006/main" marL="3657600" indent="0" algn="l" defTabSz="914400">
-      <a:defRPr sz="1800" kern="1200">
-        <a:solidFill>
-          <a:schemeClr val="tx1"/>
-        </a:solidFill>
-        <a:latin typeface="+mn-lt"/>
-        <a:ea typeface="+mn-ea"/>
-        <a:cs typeface="+mn-cs"/>
-      </a:defRPr>
-    </a:lvl9pPr>
-  </p:defaultTextStyle>
 </p:presentation>
 </file>
 
@@ -1453,7 +1358,26 @@
         <p:txBody>
           <a:bodyPr xmlns:a="http://schemas.openxmlformats.org/drawingml/2006/main"/>
           <a:lstStyle xmlns:a="http://schemas.openxmlformats.org/drawingml/2006/main"/>
-          <a:p xmlns:a="http://schemas.openxmlformats.org/drawingml/2006/main"/>
+          <a:p xmlns:a="http://schemas.openxmlformats.org/drawingml/2006/main">
+            <a:r>
+              <a:t>[Sources]</a:t>
+            </a:r>
+          </a:p>
+          <a:p xmlns:a="http://schemas.openxmlformats.org/drawingml/2006/main">
+            <a:r>
+              <a:t>- RPS mata kuliah Revisi AI 2026, Program Studi S2 Statistika Terapan FMIPA Universitas Padjadjaran.</a:t>
+            </a:r>
+          </a:p>
+          <a:p xmlns:a="http://schemas.openxmlformats.org/drawingml/2006/main">
+            <a:r>
+              <a:t>[/Sources]</a:t>
+            </a:r>
+          </a:p>
+          <a:p xmlns:a="http://schemas.openxmlformats.org/drawingml/2006/main">
+            <a:r>
+              <a:t>Penutup: CPL tetap. AI adalah akselerator ketercapaian CPMK/Sub-CPMK, bukan pengganti penalaran statistika. Tekankan kewajiban prompt log ringkas, sumber, kode/notebook reproducible, validasi, dan audit trail.</a:t>
+            </a:r>
+          </a:p>
         </p:txBody>
       </p:sp>
       <p:sp>
@@ -2010,8 +1934,8 @@
   </p:cSld>
   <p:clrMap bg1="lt1" tx1="dk1" bg2="lt2" tx2="dk2" accent1="accent1" accent2="accent2" accent3="accent3" accent4="accent4" accent5="accent5" accent6="accent6" hlink="hlink" folHlink="folHlink"/>
   <p:sldLayoutIdLst>
-    <p:sldLayoutId xmlns:r="http://schemas.openxmlformats.org/officeDocument/2006/relationships" id="2147483649" r:id="R9886bb5f30d34288"/>
-    <p:sldLayoutId xmlns:r="http://schemas.openxmlformats.org/officeDocument/2006/relationships" id="2147483650" r:id="R5488794d24da43cc"/>
+    <p:sldLayoutId xmlns:r="http://schemas.openxmlformats.org/officeDocument/2006/relationships" id="2147483649" r:id="Rfdf790d73a6a4773"/>
+    <p:sldLayoutId xmlns:r="http://schemas.openxmlformats.org/officeDocument/2006/relationships" id="2147483650" r:id="Rc67ae63352674e91"/>
   </p:sldLayoutIdLst>
   <p:hf sldNum="0" hdr="0" ftr="0" dt="0"/>
   <p:txStyles>
@@ -2577,7 +2501,7 @@
           <p:nvPr/>
         </p:nvPicPr>
         <p:blipFill>
-          <a:blip xmlns:r="http://schemas.openxmlformats.org/officeDocument/2006/relationships" xmlns:a="http://schemas.openxmlformats.org/drawingml/2006/main" r:embed="R2df648f23da34790"/>
+          <a:blip xmlns:r="http://schemas.openxmlformats.org/officeDocument/2006/relationships" xmlns:a="http://schemas.openxmlformats.org/drawingml/2006/main" r:embed="Rc6a85a17d542497a"/>
           <a:stretch xmlns:a="http://schemas.openxmlformats.org/drawingml/2006/main">
             <a:fillRect l="0" t="0" r="0" b="0"/>
           </a:stretch>
@@ -2723,7 +2647,7 @@
           <p:nvPr/>
         </p:nvPicPr>
         <p:blipFill>
-          <a:blip xmlns:r="http://schemas.openxmlformats.org/officeDocument/2006/relationships" xmlns:a="http://schemas.openxmlformats.org/drawingml/2006/main" r:embed="R71d371758b324e07"/>
+          <a:blip xmlns:r="http://schemas.openxmlformats.org/officeDocument/2006/relationships" xmlns:a="http://schemas.openxmlformats.org/drawingml/2006/main" r:embed="R6e6bc64dbc494208"/>
           <a:stretch xmlns:a="http://schemas.openxmlformats.org/drawingml/2006/main">
             <a:fillRect l="0" t="0" r="0" b="0"/>
           </a:stretch>
@@ -3345,7 +3269,7 @@
           <p:nvPr/>
         </p:nvPicPr>
         <p:blipFill>
-          <a:blip xmlns:r="http://schemas.openxmlformats.org/officeDocument/2006/relationships" xmlns:a="http://schemas.openxmlformats.org/drawingml/2006/main" r:embed="R0926051e0dac4232"/>
+          <a:blip xmlns:r="http://schemas.openxmlformats.org/officeDocument/2006/relationships" xmlns:a="http://schemas.openxmlformats.org/drawingml/2006/main" r:embed="Rbfcf89212c6f433b"/>
           <a:stretch xmlns:a="http://schemas.openxmlformats.org/drawingml/2006/main">
             <a:fillRect l="0" t="0" r="0" b="0"/>
           </a:stretch>
@@ -5495,7 +5419,7 @@
           <p:nvPr/>
         </p:nvPicPr>
         <p:blipFill>
-          <a:blip xmlns:r="http://schemas.openxmlformats.org/officeDocument/2006/relationships" xmlns:a="http://schemas.openxmlformats.org/drawingml/2006/main" r:embed="R96ecd1a700de4127"/>
+          <a:blip xmlns:r="http://schemas.openxmlformats.org/officeDocument/2006/relationships" xmlns:a="http://schemas.openxmlformats.org/drawingml/2006/main" r:embed="R7462ac20f2604d6a"/>
           <a:stretch xmlns:a="http://schemas.openxmlformats.org/drawingml/2006/main">
             <a:fillRect l="0" t="0" r="0" b="0"/>
           </a:stretch>
@@ -5774,7 +5698,7 @@
           <p:nvPr/>
         </p:nvPicPr>
         <p:blipFill>
-          <a:blip xmlns:r="http://schemas.openxmlformats.org/officeDocument/2006/relationships" xmlns:a="http://schemas.openxmlformats.org/drawingml/2006/main" r:embed="R515b8da1bdca4768"/>
+          <a:blip xmlns:r="http://schemas.openxmlformats.org/officeDocument/2006/relationships" xmlns:a="http://schemas.openxmlformats.org/drawingml/2006/main" r:embed="R3f91aa83b4ae47f5"/>
           <a:stretch xmlns:a="http://schemas.openxmlformats.org/drawingml/2006/main">
             <a:fillRect l="0" t="0" r="0" b="0"/>
           </a:stretch>
@@ -7308,7 +7232,7 @@
           <p:nvPr/>
         </p:nvPicPr>
         <p:blipFill>
-          <a:blip xmlns:r="http://schemas.openxmlformats.org/officeDocument/2006/relationships" xmlns:a="http://schemas.openxmlformats.org/drawingml/2006/main" r:embed="R73153643a8554d2e"/>
+          <a:blip xmlns:r="http://schemas.openxmlformats.org/officeDocument/2006/relationships" xmlns:a="http://schemas.openxmlformats.org/drawingml/2006/main" r:embed="R71192ae20a444c5e"/>
           <a:stretch xmlns:a="http://schemas.openxmlformats.org/drawingml/2006/main">
             <a:fillRect l="0" t="0" r="0" b="0"/>
           </a:stretch>
@@ -8477,7 +8401,7 @@
           <p:nvPr/>
         </p:nvPicPr>
         <p:blipFill>
-          <a:blip xmlns:r="http://schemas.openxmlformats.org/officeDocument/2006/relationships" xmlns:a="http://schemas.openxmlformats.org/drawingml/2006/main" r:embed="R1736abff96664c4d"/>
+          <a:blip xmlns:r="http://schemas.openxmlformats.org/officeDocument/2006/relationships" xmlns:a="http://schemas.openxmlformats.org/drawingml/2006/main" r:embed="Re63b537751214610"/>
           <a:stretch xmlns:a="http://schemas.openxmlformats.org/drawingml/2006/main">
             <a:fillRect l="0" t="0" r="0" b="0"/>
           </a:stretch>
@@ -9704,7 +9628,7 @@
           <p:nvPr/>
         </p:nvPicPr>
         <p:blipFill>
-          <a:blip xmlns:r="http://schemas.openxmlformats.org/officeDocument/2006/relationships" xmlns:a="http://schemas.openxmlformats.org/drawingml/2006/main" r:embed="R69b2664e9e154b27"/>
+          <a:blip xmlns:r="http://schemas.openxmlformats.org/officeDocument/2006/relationships" xmlns:a="http://schemas.openxmlformats.org/drawingml/2006/main" r:embed="Ra731e67590dc4e29"/>
           <a:stretch xmlns:a="http://schemas.openxmlformats.org/drawingml/2006/main">
             <a:fillRect l="0" t="0" r="0" b="0"/>
           </a:stretch>
@@ -10909,7 +10833,7 @@
           <p:nvPr/>
         </p:nvPicPr>
         <p:blipFill>
-          <a:blip xmlns:r="http://schemas.openxmlformats.org/officeDocument/2006/relationships" xmlns:a="http://schemas.openxmlformats.org/drawingml/2006/main" r:embed="R00c5baa575eb4495"/>
+          <a:blip xmlns:r="http://schemas.openxmlformats.org/officeDocument/2006/relationships" xmlns:a="http://schemas.openxmlformats.org/drawingml/2006/main" r:embed="Rc2287569cad34c23"/>
           <a:stretch xmlns:a="http://schemas.openxmlformats.org/drawingml/2006/main">
             <a:fillRect l="0" t="0" r="0" b="0"/>
           </a:stretch>
@@ -11188,7 +11112,7 @@
           <p:nvPr/>
         </p:nvPicPr>
         <p:blipFill>
-          <a:blip xmlns:r="http://schemas.openxmlformats.org/officeDocument/2006/relationships" xmlns:a="http://schemas.openxmlformats.org/drawingml/2006/main" r:embed="Ra88d2f6bfe354026"/>
+          <a:blip xmlns:r="http://schemas.openxmlformats.org/officeDocument/2006/relationships" xmlns:a="http://schemas.openxmlformats.org/drawingml/2006/main" r:embed="R6cba420568974130"/>
           <a:stretch xmlns:a="http://schemas.openxmlformats.org/drawingml/2006/main">
             <a:fillRect l="0" t="0" r="0" b="0"/>
           </a:stretch>
@@ -12733,7 +12657,7 @@
           <p:nvPr/>
         </p:nvPicPr>
         <p:blipFill>
-          <a:blip xmlns:r="http://schemas.openxmlformats.org/officeDocument/2006/relationships" xmlns:a="http://schemas.openxmlformats.org/drawingml/2006/main" r:embed="R326a427003434e6e"/>
+          <a:blip xmlns:r="http://schemas.openxmlformats.org/officeDocument/2006/relationships" xmlns:a="http://schemas.openxmlformats.org/drawingml/2006/main" r:embed="Rac2f3f4b86f34b60"/>
           <a:stretch xmlns:a="http://schemas.openxmlformats.org/drawingml/2006/main">
             <a:fillRect l="0" t="0" r="0" b="0"/>
           </a:stretch>
@@ -14750,7 +14674,7 @@
           <p:nvPr/>
         </p:nvPicPr>
         <p:blipFill>
-          <a:blip xmlns:r="http://schemas.openxmlformats.org/officeDocument/2006/relationships" xmlns:a="http://schemas.openxmlformats.org/drawingml/2006/main" r:embed="Rd83bedc7843c4fcf"/>
+          <a:blip xmlns:r="http://schemas.openxmlformats.org/officeDocument/2006/relationships" xmlns:a="http://schemas.openxmlformats.org/drawingml/2006/main" r:embed="Rad1dbfe5972b4980"/>
           <a:stretch xmlns:a="http://schemas.openxmlformats.org/drawingml/2006/main">
             <a:fillRect l="0" t="0" r="0" b="0"/>
           </a:stretch>
@@ -15977,7 +15901,7 @@
           <p:nvPr/>
         </p:nvPicPr>
         <p:blipFill>
-          <a:blip xmlns:r="http://schemas.openxmlformats.org/officeDocument/2006/relationships" xmlns:a="http://schemas.openxmlformats.org/drawingml/2006/main" r:embed="R26b6f9e42f674f72"/>
+          <a:blip xmlns:r="http://schemas.openxmlformats.org/officeDocument/2006/relationships" xmlns:a="http://schemas.openxmlformats.org/drawingml/2006/main" r:embed="R190c2b402b6a435a"/>
           <a:stretch xmlns:a="http://schemas.openxmlformats.org/drawingml/2006/main">
             <a:fillRect l="0" t="0" r="0" b="0"/>
           </a:stretch>
@@ -17118,7 +17042,7 @@
           <p:nvPr/>
         </p:nvPicPr>
         <p:blipFill>
-          <a:blip xmlns:r="http://schemas.openxmlformats.org/officeDocument/2006/relationships" xmlns:a="http://schemas.openxmlformats.org/drawingml/2006/main" r:embed="Re50715cf3d8041e6"/>
+          <a:blip xmlns:r="http://schemas.openxmlformats.org/officeDocument/2006/relationships" xmlns:a="http://schemas.openxmlformats.org/drawingml/2006/main" r:embed="Refcbd0d6c9794d3c"/>
           <a:stretch xmlns:a="http://schemas.openxmlformats.org/drawingml/2006/main">
             <a:fillRect l="0" t="0" r="0" b="0"/>
           </a:stretch>
@@ -18583,7 +18507,7 @@
           <p:nvPr/>
         </p:nvPicPr>
         <p:blipFill>
-          <a:blip xmlns:r="http://schemas.openxmlformats.org/officeDocument/2006/relationships" xmlns:a="http://schemas.openxmlformats.org/drawingml/2006/main" r:embed="Re2afb62973c145f5"/>
+          <a:blip xmlns:r="http://schemas.openxmlformats.org/officeDocument/2006/relationships" xmlns:a="http://schemas.openxmlformats.org/drawingml/2006/main" r:embed="R995bdda6febb4c33"/>
           <a:stretch xmlns:a="http://schemas.openxmlformats.org/drawingml/2006/main">
             <a:fillRect l="0" t="0" r="0" b="0"/>
           </a:stretch>
@@ -18729,7 +18653,7 @@
           <p:nvPr/>
         </p:nvPicPr>
         <p:blipFill>
-          <a:blip xmlns:r="http://schemas.openxmlformats.org/officeDocument/2006/relationships" xmlns:a="http://schemas.openxmlformats.org/drawingml/2006/main" r:embed="R9b45800cdad54a76"/>
+          <a:blip xmlns:r="http://schemas.openxmlformats.org/officeDocument/2006/relationships" xmlns:a="http://schemas.openxmlformats.org/drawingml/2006/main" r:embed="Re7b95875d09649df"/>
           <a:stretch xmlns:a="http://schemas.openxmlformats.org/drawingml/2006/main">
             <a:fillRect l="0" t="0" r="0" b="0"/>
           </a:stretch>
@@ -18833,7 +18757,7 @@
                 <a:ea typeface="Aptos Display"/>
                 <a:cs typeface="Aptos Display"/>
               </a:rPr>
-              <a:t>Dari data menuju</a:t>
+              <a:t>AI mempercepat proses,</a:t>
             </a:r>
           </a:p>
           <a:p xmlns:a="http://schemas.openxmlformats.org/drawingml/2006/main">
@@ -18849,7 +18773,7 @@
                 <a:ea typeface="Aptos Display"/>
                 <a:cs typeface="Aptos Display"/>
               </a:rPr>
-              <a:t>keputusan yang dapat diuji</a:t>
+              <a:t>penalaran tetap memimpin</a:t>
             </a:r>
           </a:p>
         </p:txBody>
@@ -18916,7 +18840,7 @@
         </p:spPr>
         <p:txBody>
           <a:bodyPr xmlns:a="http://schemas.openxmlformats.org/drawingml/2006/main" wrap="square" lIns="635" tIns="635" rIns="635" bIns="635" anchor="t">
-            <a:normAutofit fontScale="100000"/>
+            <a:normAutofit fontScale="93620"/>
           </a:bodyPr>
           <a:lstStyle xmlns:a="http://schemas.openxmlformats.org/drawingml/2006/main"/>
           <a:p xmlns:a="http://schemas.openxmlformats.org/drawingml/2006/main">
@@ -18932,7 +18856,7 @@
                 <a:ea typeface="Aptos"/>
                 <a:cs typeface="Aptos"/>
               </a:rPr>
-              <a:t>Model Linear Generalisasi menghubungkan teori, data, metode, validasi, dan komunikasi untuk menghasilkan keputusan yang sahih, dapat direplikasi, dan bertanggung…</a:t>
+              <a:t>Model Linear Generalisasi memadukan teori, data, komputasi, validasi, dan komunikasi. AI mempercepat eksplorasi dan pemeriksaan awal; mahasiswa tetap memverifikasi asumsi, kode, hasil numerik, ketidakpastian, sumber, dan dampak sebelum mengambil keputusan.</a:t>
             </a:r>
           </a:p>
         </p:txBody>
@@ -19102,7 +19026,7 @@
           <p:nvPr/>
         </p:nvPicPr>
         <p:blipFill>
-          <a:blip xmlns:r="http://schemas.openxmlformats.org/officeDocument/2006/relationships" xmlns:a="http://schemas.openxmlformats.org/drawingml/2006/main" r:embed="Rbe88e179f7294985"/>
+          <a:blip xmlns:r="http://schemas.openxmlformats.org/officeDocument/2006/relationships" xmlns:a="http://schemas.openxmlformats.org/drawingml/2006/main" r:embed="Rb7c8e20d9aef46f8"/>
           <a:stretch xmlns:a="http://schemas.openxmlformats.org/drawingml/2006/main">
             <a:fillRect l="0" t="0" r="0" b="0"/>
           </a:stretch>
@@ -20233,7 +20157,7 @@
           <p:nvPr/>
         </p:nvPicPr>
         <p:blipFill>
-          <a:blip xmlns:r="http://schemas.openxmlformats.org/officeDocument/2006/relationships" xmlns:a="http://schemas.openxmlformats.org/drawingml/2006/main" r:embed="Re93bbbd7ef8f4e66"/>
+          <a:blip xmlns:r="http://schemas.openxmlformats.org/officeDocument/2006/relationships" xmlns:a="http://schemas.openxmlformats.org/drawingml/2006/main" r:embed="R20c3fd48d15a4d4e"/>
           <a:stretch xmlns:a="http://schemas.openxmlformats.org/drawingml/2006/main">
             <a:fillRect l="0" t="0" r="0" b="0"/>
           </a:stretch>
@@ -22337,7 +22261,7 @@
           <p:nvPr/>
         </p:nvPicPr>
         <p:blipFill>
-          <a:blip xmlns:r="http://schemas.openxmlformats.org/officeDocument/2006/relationships" xmlns:a="http://schemas.openxmlformats.org/drawingml/2006/main" r:embed="R6ebfcd30ecb24728"/>
+          <a:blip xmlns:r="http://schemas.openxmlformats.org/officeDocument/2006/relationships" xmlns:a="http://schemas.openxmlformats.org/drawingml/2006/main" r:embed="R0673b0974ce04e09"/>
           <a:stretch xmlns:a="http://schemas.openxmlformats.org/drawingml/2006/main">
             <a:fillRect l="0" t="0" r="0" b="0"/>
           </a:stretch>
@@ -23619,7 +23543,7 @@
           <p:nvPr/>
         </p:nvPicPr>
         <p:blipFill>
-          <a:blip xmlns:r="http://schemas.openxmlformats.org/officeDocument/2006/relationships" xmlns:a="http://schemas.openxmlformats.org/drawingml/2006/main" r:embed="Rccb9019e66a64971"/>
+          <a:blip xmlns:r="http://schemas.openxmlformats.org/officeDocument/2006/relationships" xmlns:a="http://schemas.openxmlformats.org/drawingml/2006/main" r:embed="R248d562ea4e54e61"/>
           <a:stretch xmlns:a="http://schemas.openxmlformats.org/drawingml/2006/main">
             <a:fillRect l="0" t="0" r="0" b="0"/>
           </a:stretch>
@@ -23898,7 +23822,7 @@
           <p:nvPr/>
         </p:nvPicPr>
         <p:blipFill>
-          <a:blip xmlns:r="http://schemas.openxmlformats.org/officeDocument/2006/relationships" xmlns:a="http://schemas.openxmlformats.org/drawingml/2006/main" r:embed="Rb2af79a6c8d24117"/>
+          <a:blip xmlns:r="http://schemas.openxmlformats.org/officeDocument/2006/relationships" xmlns:a="http://schemas.openxmlformats.org/drawingml/2006/main" r:embed="Ra8868fd77a0549d5"/>
           <a:stretch xmlns:a="http://schemas.openxmlformats.org/drawingml/2006/main">
             <a:fillRect l="0" t="0" r="0" b="0"/>
           </a:stretch>
@@ -25978,7 +25902,7 @@
           <p:nvPr/>
         </p:nvPicPr>
         <p:blipFill>
-          <a:blip xmlns:r="http://schemas.openxmlformats.org/officeDocument/2006/relationships" xmlns:a="http://schemas.openxmlformats.org/drawingml/2006/main" r:embed="Rb7e936e4e2e54311"/>
+          <a:blip xmlns:r="http://schemas.openxmlformats.org/officeDocument/2006/relationships" xmlns:a="http://schemas.openxmlformats.org/drawingml/2006/main" r:embed="R44f2f5db34e44705"/>
           <a:stretch xmlns:a="http://schemas.openxmlformats.org/drawingml/2006/main">
             <a:fillRect l="0" t="0" r="0" b="0"/>
           </a:stretch>
@@ -27391,7 +27315,7 @@
           <p:nvPr/>
         </p:nvPicPr>
         <p:blipFill>
-          <a:blip xmlns:r="http://schemas.openxmlformats.org/officeDocument/2006/relationships" xmlns:a="http://schemas.openxmlformats.org/drawingml/2006/main" r:embed="R73c440f6ba9b4e28"/>
+          <a:blip xmlns:r="http://schemas.openxmlformats.org/officeDocument/2006/relationships" xmlns:a="http://schemas.openxmlformats.org/drawingml/2006/main" r:embed="R4d5bffe9be384ba5"/>
           <a:stretch xmlns:a="http://schemas.openxmlformats.org/drawingml/2006/main">
             <a:fillRect l="0" t="0" r="0" b="0"/>
           </a:stretch>
